--- a/Aircraft design, DT1.pptx
+++ b/Aircraft design, DT1.pptx
@@ -7,6 +7,11 @@
   <p:sldIdLst>
     <p:sldId id="256" r:id="rId2"/>
     <p:sldId id="257" r:id="rId3"/>
+    <p:sldId id="258" r:id="rId4"/>
+    <p:sldId id="259" r:id="rId5"/>
+    <p:sldId id="260" r:id="rId6"/>
+    <p:sldId id="261" r:id="rId7"/>
+    <p:sldId id="262" r:id="rId8"/>
   </p:sldIdLst>
   <p:sldSz cx="12192000" cy="6858000"/>
   <p:notesSz cx="6858000" cy="9144000"/>
@@ -3447,7 +3452,10 @@
           <a:bodyPr/>
           <a:lstStyle/>
           <a:p>
-            <a:endParaRPr lang="sv-SE"/>
+            <a:r>
+              <a:rPr lang="sv-SE" dirty="0"/>
+              <a:t>First sketch</a:t>
+            </a:r>
           </a:p>
         </p:txBody>
       </p:sp>
@@ -3480,6 +3488,421 @@
     <p:extLst>
       <p:ext uri="{BB962C8B-B14F-4D97-AF65-F5344CB8AC3E}">
         <p14:creationId xmlns:p14="http://schemas.microsoft.com/office/powerpoint/2010/main" val="1723634799"/>
+      </p:ext>
+    </p:extLst>
+  </p:cSld>
+  <p:clrMapOvr>
+    <a:masterClrMapping/>
+  </p:clrMapOvr>
+</p:sld>
+</file>
+
+<file path=ppt/slides/slide3.xml><?xml version="1.0" encoding="utf-8"?>
+<p:sld xmlns:a="http://schemas.openxmlformats.org/drawingml/2006/main" xmlns:r="http://schemas.openxmlformats.org/officeDocument/2006/relationships" xmlns:p="http://schemas.openxmlformats.org/presentationml/2006/main">
+  <p:cSld>
+    <p:spTree>
+      <p:nvGrpSpPr>
+        <p:cNvPr id="1" name=""/>
+        <p:cNvGrpSpPr/>
+        <p:nvPr/>
+      </p:nvGrpSpPr>
+      <p:grpSpPr>
+        <a:xfrm>
+          <a:off x="0" y="0"/>
+          <a:ext cx="0" cy="0"/>
+          <a:chOff x="0" y="0"/>
+          <a:chExt cx="0" cy="0"/>
+        </a:xfrm>
+      </p:grpSpPr>
+      <p:sp>
+        <p:nvSpPr>
+          <p:cNvPr id="2" name="Title 1">
+            <a:extLst>
+              <a:ext uri="{FF2B5EF4-FFF2-40B4-BE49-F238E27FC236}">
+                <a16:creationId xmlns:a16="http://schemas.microsoft.com/office/drawing/2014/main" id="{96FAA129-33BA-252E-CA28-37B8520C360C}"/>
+              </a:ext>
+            </a:extLst>
+          </p:cNvPr>
+          <p:cNvSpPr>
+            <a:spLocks noGrp="1"/>
+          </p:cNvSpPr>
+          <p:nvPr>
+            <p:ph type="title"/>
+          </p:nvPr>
+        </p:nvSpPr>
+        <p:spPr/>
+        <p:txBody>
+          <a:bodyPr/>
+          <a:lstStyle/>
+          <a:p>
+            <a:r>
+              <a:rPr lang="sv-SE" dirty="0"/>
+              <a:t>Sizing mission</a:t>
+            </a:r>
+          </a:p>
+        </p:txBody>
+      </p:sp>
+      <p:sp>
+        <p:nvSpPr>
+          <p:cNvPr id="3" name="Content Placeholder 2">
+            <a:extLst>
+              <a:ext uri="{FF2B5EF4-FFF2-40B4-BE49-F238E27FC236}">
+                <a16:creationId xmlns:a16="http://schemas.microsoft.com/office/drawing/2014/main" id="{231B26AB-BEDA-5D63-2F50-85DBFDB31182}"/>
+              </a:ext>
+            </a:extLst>
+          </p:cNvPr>
+          <p:cNvSpPr>
+            <a:spLocks noGrp="1"/>
+          </p:cNvSpPr>
+          <p:nvPr>
+            <p:ph idx="1"/>
+          </p:nvPr>
+        </p:nvSpPr>
+        <p:spPr/>
+        <p:txBody>
+          <a:bodyPr/>
+          <a:lstStyle/>
+          <a:p>
+            <a:endParaRPr lang="sv-SE"/>
+          </a:p>
+        </p:txBody>
+      </p:sp>
+    </p:spTree>
+    <p:extLst>
+      <p:ext uri="{BB962C8B-B14F-4D97-AF65-F5344CB8AC3E}">
+        <p14:creationId xmlns:p14="http://schemas.microsoft.com/office/powerpoint/2010/main" val="3589907016"/>
+      </p:ext>
+    </p:extLst>
+  </p:cSld>
+  <p:clrMapOvr>
+    <a:masterClrMapping/>
+  </p:clrMapOvr>
+</p:sld>
+</file>
+
+<file path=ppt/slides/slide4.xml><?xml version="1.0" encoding="utf-8"?>
+<p:sld xmlns:a="http://schemas.openxmlformats.org/drawingml/2006/main" xmlns:r="http://schemas.openxmlformats.org/officeDocument/2006/relationships" xmlns:p="http://schemas.openxmlformats.org/presentationml/2006/main">
+  <p:cSld>
+    <p:spTree>
+      <p:nvGrpSpPr>
+        <p:cNvPr id="1" name=""/>
+        <p:cNvGrpSpPr/>
+        <p:nvPr/>
+      </p:nvGrpSpPr>
+      <p:grpSpPr>
+        <a:xfrm>
+          <a:off x="0" y="0"/>
+          <a:ext cx="0" cy="0"/>
+          <a:chOff x="0" y="0"/>
+          <a:chExt cx="0" cy="0"/>
+        </a:xfrm>
+      </p:grpSpPr>
+      <p:sp>
+        <p:nvSpPr>
+          <p:cNvPr id="2" name="Title 1">
+            <a:extLst>
+              <a:ext uri="{FF2B5EF4-FFF2-40B4-BE49-F238E27FC236}">
+                <a16:creationId xmlns:a16="http://schemas.microsoft.com/office/drawing/2014/main" id="{A31429F0-B564-D8A0-1AB5-C13BE249BA84}"/>
+              </a:ext>
+            </a:extLst>
+          </p:cNvPr>
+          <p:cNvSpPr>
+            <a:spLocks noGrp="1"/>
+          </p:cNvSpPr>
+          <p:nvPr>
+            <p:ph type="title"/>
+          </p:nvPr>
+        </p:nvSpPr>
+        <p:spPr/>
+        <p:txBody>
+          <a:bodyPr/>
+          <a:lstStyle/>
+          <a:p>
+            <a:r>
+              <a:rPr lang="sv-SE" dirty="0"/>
+              <a:t>Engine performance</a:t>
+            </a:r>
+          </a:p>
+        </p:txBody>
+      </p:sp>
+      <p:sp>
+        <p:nvSpPr>
+          <p:cNvPr id="3" name="Content Placeholder 2">
+            <a:extLst>
+              <a:ext uri="{FF2B5EF4-FFF2-40B4-BE49-F238E27FC236}">
+                <a16:creationId xmlns:a16="http://schemas.microsoft.com/office/drawing/2014/main" id="{5B5DB4A1-81D0-9D35-D029-3ADFCBCCE49E}"/>
+              </a:ext>
+            </a:extLst>
+          </p:cNvPr>
+          <p:cNvSpPr>
+            <a:spLocks noGrp="1"/>
+          </p:cNvSpPr>
+          <p:nvPr>
+            <p:ph idx="1"/>
+          </p:nvPr>
+        </p:nvSpPr>
+        <p:spPr/>
+        <p:txBody>
+          <a:bodyPr/>
+          <a:lstStyle/>
+          <a:p>
+            <a:endParaRPr lang="sv-SE"/>
+          </a:p>
+        </p:txBody>
+      </p:sp>
+    </p:spTree>
+    <p:extLst>
+      <p:ext uri="{BB962C8B-B14F-4D97-AF65-F5344CB8AC3E}">
+        <p14:creationId xmlns:p14="http://schemas.microsoft.com/office/powerpoint/2010/main" val="729112075"/>
+      </p:ext>
+    </p:extLst>
+  </p:cSld>
+  <p:clrMapOvr>
+    <a:masterClrMapping/>
+  </p:clrMapOvr>
+</p:sld>
+</file>
+
+<file path=ppt/slides/slide5.xml><?xml version="1.0" encoding="utf-8"?>
+<p:sld xmlns:a="http://schemas.openxmlformats.org/drawingml/2006/main" xmlns:r="http://schemas.openxmlformats.org/officeDocument/2006/relationships" xmlns:p="http://schemas.openxmlformats.org/presentationml/2006/main">
+  <p:cSld>
+    <p:spTree>
+      <p:nvGrpSpPr>
+        <p:cNvPr id="1" name=""/>
+        <p:cNvGrpSpPr/>
+        <p:nvPr/>
+      </p:nvGrpSpPr>
+      <p:grpSpPr>
+        <a:xfrm>
+          <a:off x="0" y="0"/>
+          <a:ext cx="0" cy="0"/>
+          <a:chOff x="0" y="0"/>
+          <a:chExt cx="0" cy="0"/>
+        </a:xfrm>
+      </p:grpSpPr>
+      <p:sp>
+        <p:nvSpPr>
+          <p:cNvPr id="2" name="Title 1">
+            <a:extLst>
+              <a:ext uri="{FF2B5EF4-FFF2-40B4-BE49-F238E27FC236}">
+                <a16:creationId xmlns:a16="http://schemas.microsoft.com/office/drawing/2014/main" id="{BC7CAB20-C293-1980-6FFA-08CB8CD1AB9D}"/>
+              </a:ext>
+            </a:extLst>
+          </p:cNvPr>
+          <p:cNvSpPr>
+            <a:spLocks noGrp="1"/>
+          </p:cNvSpPr>
+          <p:nvPr>
+            <p:ph type="title"/>
+          </p:nvPr>
+        </p:nvSpPr>
+        <p:spPr/>
+        <p:txBody>
+          <a:bodyPr/>
+          <a:lstStyle/>
+          <a:p>
+            <a:r>
+              <a:rPr lang="sv-SE" dirty="0"/>
+              <a:t>Aerodynamics</a:t>
+            </a:r>
+          </a:p>
+        </p:txBody>
+      </p:sp>
+      <p:sp>
+        <p:nvSpPr>
+          <p:cNvPr id="3" name="Content Placeholder 2">
+            <a:extLst>
+              <a:ext uri="{FF2B5EF4-FFF2-40B4-BE49-F238E27FC236}">
+                <a16:creationId xmlns:a16="http://schemas.microsoft.com/office/drawing/2014/main" id="{B88DD510-0195-500B-88C8-B5D3A4E94BCD}"/>
+              </a:ext>
+            </a:extLst>
+          </p:cNvPr>
+          <p:cNvSpPr>
+            <a:spLocks noGrp="1"/>
+          </p:cNvSpPr>
+          <p:nvPr>
+            <p:ph idx="1"/>
+          </p:nvPr>
+        </p:nvSpPr>
+        <p:spPr/>
+        <p:txBody>
+          <a:bodyPr/>
+          <a:lstStyle/>
+          <a:p>
+            <a:endParaRPr lang="sv-SE"/>
+          </a:p>
+        </p:txBody>
+      </p:sp>
+    </p:spTree>
+    <p:extLst>
+      <p:ext uri="{BB962C8B-B14F-4D97-AF65-F5344CB8AC3E}">
+        <p14:creationId xmlns:p14="http://schemas.microsoft.com/office/powerpoint/2010/main" val="2097738404"/>
+      </p:ext>
+    </p:extLst>
+  </p:cSld>
+  <p:clrMapOvr>
+    <a:masterClrMapping/>
+  </p:clrMapOvr>
+</p:sld>
+</file>
+
+<file path=ppt/slides/slide6.xml><?xml version="1.0" encoding="utf-8"?>
+<p:sld xmlns:a="http://schemas.openxmlformats.org/drawingml/2006/main" xmlns:r="http://schemas.openxmlformats.org/officeDocument/2006/relationships" xmlns:p="http://schemas.openxmlformats.org/presentationml/2006/main">
+  <p:cSld>
+    <p:spTree>
+      <p:nvGrpSpPr>
+        <p:cNvPr id="1" name=""/>
+        <p:cNvGrpSpPr/>
+        <p:nvPr/>
+      </p:nvGrpSpPr>
+      <p:grpSpPr>
+        <a:xfrm>
+          <a:off x="0" y="0"/>
+          <a:ext cx="0" cy="0"/>
+          <a:chOff x="0" y="0"/>
+          <a:chExt cx="0" cy="0"/>
+        </a:xfrm>
+      </p:grpSpPr>
+      <p:sp>
+        <p:nvSpPr>
+          <p:cNvPr id="2" name="Title 1">
+            <a:extLst>
+              <a:ext uri="{FF2B5EF4-FFF2-40B4-BE49-F238E27FC236}">
+                <a16:creationId xmlns:a16="http://schemas.microsoft.com/office/drawing/2014/main" id="{20FBE078-907D-4477-4306-C8E100AD62C6}"/>
+              </a:ext>
+            </a:extLst>
+          </p:cNvPr>
+          <p:cNvSpPr>
+            <a:spLocks noGrp="1"/>
+          </p:cNvSpPr>
+          <p:nvPr>
+            <p:ph type="title"/>
+          </p:nvPr>
+        </p:nvSpPr>
+        <p:spPr/>
+        <p:txBody>
+          <a:bodyPr/>
+          <a:lstStyle/>
+          <a:p>
+            <a:r>
+              <a:rPr lang="sv-SE" dirty="0"/>
+              <a:t>Weight</a:t>
+            </a:r>
+          </a:p>
+        </p:txBody>
+      </p:sp>
+      <p:sp>
+        <p:nvSpPr>
+          <p:cNvPr id="3" name="Content Placeholder 2">
+            <a:extLst>
+              <a:ext uri="{FF2B5EF4-FFF2-40B4-BE49-F238E27FC236}">
+                <a16:creationId xmlns:a16="http://schemas.microsoft.com/office/drawing/2014/main" id="{CE6AA207-408B-9C9F-30A3-C9C439EE1DFF}"/>
+              </a:ext>
+            </a:extLst>
+          </p:cNvPr>
+          <p:cNvSpPr>
+            <a:spLocks noGrp="1"/>
+          </p:cNvSpPr>
+          <p:nvPr>
+            <p:ph idx="1"/>
+          </p:nvPr>
+        </p:nvSpPr>
+        <p:spPr/>
+        <p:txBody>
+          <a:bodyPr/>
+          <a:lstStyle/>
+          <a:p>
+            <a:endParaRPr lang="sv-SE"/>
+          </a:p>
+        </p:txBody>
+      </p:sp>
+    </p:spTree>
+    <p:extLst>
+      <p:ext uri="{BB962C8B-B14F-4D97-AF65-F5344CB8AC3E}">
+        <p14:creationId xmlns:p14="http://schemas.microsoft.com/office/powerpoint/2010/main" val="1560088737"/>
+      </p:ext>
+    </p:extLst>
+  </p:cSld>
+  <p:clrMapOvr>
+    <a:masterClrMapping/>
+  </p:clrMapOvr>
+</p:sld>
+</file>
+
+<file path=ppt/slides/slide7.xml><?xml version="1.0" encoding="utf-8"?>
+<p:sld xmlns:a="http://schemas.openxmlformats.org/drawingml/2006/main" xmlns:r="http://schemas.openxmlformats.org/officeDocument/2006/relationships" xmlns:p="http://schemas.openxmlformats.org/presentationml/2006/main">
+  <p:cSld>
+    <p:spTree>
+      <p:nvGrpSpPr>
+        <p:cNvPr id="1" name=""/>
+        <p:cNvGrpSpPr/>
+        <p:nvPr/>
+      </p:nvGrpSpPr>
+      <p:grpSpPr>
+        <a:xfrm>
+          <a:off x="0" y="0"/>
+          <a:ext cx="0" cy="0"/>
+          <a:chOff x="0" y="0"/>
+          <a:chExt cx="0" cy="0"/>
+        </a:xfrm>
+      </p:grpSpPr>
+      <p:sp>
+        <p:nvSpPr>
+          <p:cNvPr id="2" name="Title 1">
+            <a:extLst>
+              <a:ext uri="{FF2B5EF4-FFF2-40B4-BE49-F238E27FC236}">
+                <a16:creationId xmlns:a16="http://schemas.microsoft.com/office/drawing/2014/main" id="{99E5AC3D-5F03-8BF1-529C-1E70EBFA4BE2}"/>
+              </a:ext>
+            </a:extLst>
+          </p:cNvPr>
+          <p:cNvSpPr>
+            <a:spLocks noGrp="1"/>
+          </p:cNvSpPr>
+          <p:nvPr>
+            <p:ph type="title"/>
+          </p:nvPr>
+        </p:nvSpPr>
+        <p:spPr/>
+        <p:txBody>
+          <a:bodyPr/>
+          <a:lstStyle/>
+          <a:p>
+            <a:r>
+              <a:rPr lang="sv-SE" dirty="0"/>
+              <a:t>The concept</a:t>
+            </a:r>
+          </a:p>
+        </p:txBody>
+      </p:sp>
+      <p:sp>
+        <p:nvSpPr>
+          <p:cNvPr id="3" name="Content Placeholder 2">
+            <a:extLst>
+              <a:ext uri="{FF2B5EF4-FFF2-40B4-BE49-F238E27FC236}">
+                <a16:creationId xmlns:a16="http://schemas.microsoft.com/office/drawing/2014/main" id="{0473FD65-EC5F-E0C6-5EBF-1738A7D44EC5}"/>
+              </a:ext>
+            </a:extLst>
+          </p:cNvPr>
+          <p:cNvSpPr>
+            <a:spLocks noGrp="1"/>
+          </p:cNvSpPr>
+          <p:nvPr>
+            <p:ph idx="1"/>
+          </p:nvPr>
+        </p:nvSpPr>
+        <p:spPr/>
+        <p:txBody>
+          <a:bodyPr/>
+          <a:lstStyle/>
+          <a:p>
+            <a:endParaRPr lang="sv-SE"/>
+          </a:p>
+        </p:txBody>
+      </p:sp>
+    </p:spTree>
+    <p:extLst>
+      <p:ext uri="{BB962C8B-B14F-4D97-AF65-F5344CB8AC3E}">
+        <p14:creationId xmlns:p14="http://schemas.microsoft.com/office/powerpoint/2010/main" val="194966834"/>
       </p:ext>
     </p:extLst>
   </p:cSld>
